--- a/reports/deneb_polaris_report_20261017/blue_manual/Deneb_Polaris_설명서_파랑_시안6쪽.pptx
+++ b/reports/deneb_polaris_report_20261017/blue_manual/Deneb_Polaris_설명서_파랑_시안6쪽.pptx
@@ -14706,7 +14706,7 @@
                 <a:ea typeface="Noto Sans KR"/>
                 <a:cs typeface="Noto Sans KR"/>
               </a:rPr>
-              <a:t>최종 평가액 · 월 10만 원</a:t>
+              <a:t>14년 8개월 적립 후 최종 평가액 · 월 10만 원</a:t>
             </a:r>
           </a:p>
         </p:txBody>
@@ -14750,7 +14750,7 @@
                 <a:ea typeface="Noto Sans KR"/>
                 <a:cs typeface="Noto Sans KR"/>
               </a:rPr>
-              <a:t>2026년 8월 31일, 원금 1,760만 원 · 단위 만 원 · 세전</a:t>
+              <a:t>2012년 1월 ~ 2026년 8월 31일 · 176회 · 원금 1,760만 원 · 단위 만 원 · 세전</a:t>
             </a:r>
           </a:p>
         </p:txBody>
@@ -14967,7 +14967,7 @@
                           <a:ea typeface="Noto Sans KR"/>
                           <a:cs typeface="Noto Sans KR"/>
                         </a:rPr>
-                        <a:t>월 10만 원</a:t>
+                        <a:t>월 10만 원 · 14년 8개월</a:t>
                       </a:r>
                       <a:endParaRPr sz="800"/>
                     </a:p>
@@ -17734,7 +17734,7 @@
                 <a:ea typeface="Noto Sans KR"/>
                 <a:cs typeface="Noto Sans KR"/>
               </a:rPr>
-              <a:t>투자이익 = 최종 평가액 − 원금 1,760만 원. 회복 기간 = 최대 낙폭이 시작된 고점에서 그 고점을 다시 넘은 날까지. 금액 단위 원(억 · 만 표기).</a:t>
+              <a:t>모든 값은 2012년 1월부터 2026년 8월까지 14년 8개월 동안 매달 10만 원을 넣은 결과. 투자이익 = 최종 평가액 − 원금 1,760만 원. 회복 기간 = 최대 낙폭이 시작된 고점에서 그 고점을 다시 넘은 날까지. 금액 단위 원(억 · 만 표기).</a:t>
             </a:r>
           </a:p>
         </p:txBody>
@@ -18361,7 +18361,7 @@
                 <a:ea typeface="Malgun Gothic Semilight"/>
                 <a:cs typeface="Malgun Gothic Semilight"/>
               </a:rPr>
-              <a:t>같은 기간 · 같은 날 · 같은 비용입니다. 금액만 다릅니다.</a:t>
+              <a:t>14년 8개월 · 같은 날 · 같은 비용입니다. 금액만 다릅니다.</a:t>
             </a:r>
           </a:p>
         </p:txBody>
@@ -18484,7 +18484,7 @@
                 <a:ea typeface="Noto Sans KR"/>
                 <a:cs typeface="Noto Sans KR"/>
               </a:rPr>
-              <a:t>QQQ 단독 적립과 비교한 최종 평가액 차이</a:t>
+              <a:t>14년 8개월 적립 후 최종 평가액 차이 — QQQ 단독 적립과 비교</a:t>
             </a:r>
           </a:p>
         </p:txBody>
@@ -18625,7 +18625,7 @@
                 <a:ea typeface="Noto Sans KR"/>
                 <a:cs typeface="Noto Sans KR"/>
               </a:rPr>
-              <a:t>납입액별 최종 평가액과 투자이익</a:t>
+              <a:t>14년 8개월 적립 후 납입액별 최종 평가액과 투자이익</a:t>
             </a:r>
           </a:p>
         </p:txBody>
@@ -22972,7 +22972,7 @@
                 <a:ea typeface="Noto Sans KR"/>
                 <a:cs typeface="Noto Sans KR"/>
               </a:rPr>
-              <a:t>단위 만 원 · 세전</a:t>
+              <a:t>2012년 1월 첫 납입부터 센 적립 기간 · 단위 만 원 · 세전</a:t>
             </a:r>
           </a:p>
         </p:txBody>
@@ -22987,7 +22987,7 @@
         </p:nvGraphicFramePr>
         <p:xfrm>
           <a:off x="558000" y="4482000"/>
-          <a:ext cx="3005999" cy="1252800"/>
+          <a:ext cx="3005998" cy="1252800"/>
         </p:xfrm>
         <a:graphic>
           <a:graphicData uri="http://schemas.openxmlformats.org/drawingml/2006/table">
@@ -22996,11 +22996,12 @@
                 <a:tableStyleId>{5940675A-B579-460E-94D1-54222C63F5DA}</a:tableStyleId>
               </a:tblPr>
               <a:tblGrid>
-                <a:gridCol w="737999"/>
+                <a:gridCol w="503999"/>
+                <a:gridCol w="666000"/>
+                <a:gridCol w="378000"/>
+                <a:gridCol w="503999"/>
                 <a:gridCol w="522000"/>
-                <a:gridCol w="594000"/>
-                <a:gridCol w="594000"/>
-                <a:gridCol w="558000"/>
+                <a:gridCol w="432000"/>
               </a:tblGrid>
               <a:tr h="208800">
                 <a:tc>
@@ -23017,7 +23018,7 @@
                         </a:spcAft>
                       </a:pPr>
                       <a:r>
-                        <a:rPr sz="850" b="1" lang="ko-KR" altLang="en-US">
+                        <a:rPr sz="800" b="1" lang="ko-KR" altLang="en-US">
                           <a:solidFill>
                             <a:srgbClr val="5C6573"/>
                           </a:solidFill>
@@ -23027,7 +23028,7 @@
                         </a:rPr>
                         <a:t>달말</a:t>
                       </a:r>
-                      <a:endParaRPr sz="850"/>
+                      <a:endParaRPr sz="800"/>
                     </a:p>
                   </a:txBody>
                   <a:tcPr marL="28800" marR="43200" marT="25200" marB="25200" anchor="b">
@@ -23064,7 +23065,7 @@
                         </a:spcAft>
                       </a:pPr>
                       <a:r>
-                        <a:rPr sz="850" b="1" lang="ko-KR" altLang="en-US">
+                        <a:rPr sz="800" b="1" lang="ko-KR" altLang="en-US">
                           <a:solidFill>
                             <a:srgbClr val="5C6573"/>
                           </a:solidFill>
@@ -23072,9 +23073,9 @@
                           <a:ea typeface="Noto Sans KR"/>
                           <a:cs typeface="Noto Sans KR"/>
                         </a:rPr>
-                        <a:t>원금</a:t>
+                        <a:t>적립 기간</a:t>
                       </a:r>
-                      <a:endParaRPr sz="850"/>
+                      <a:endParaRPr sz="800"/>
                     </a:p>
                   </a:txBody>
                   <a:tcPr marL="28800" marR="43200" marT="25200" marB="25200" anchor="b">
@@ -23111,7 +23112,7 @@
                         </a:spcAft>
                       </a:pPr>
                       <a:r>
-                        <a:rPr sz="850" b="1" lang="ko-KR" altLang="en-US">
+                        <a:rPr sz="800" b="1" lang="ko-KR" altLang="en-US">
                           <a:solidFill>
                             <a:srgbClr val="5C6573"/>
                           </a:solidFill>
@@ -23119,9 +23120,9 @@
                           <a:ea typeface="Noto Sans KR"/>
                           <a:cs typeface="Noto Sans KR"/>
                         </a:rPr>
-                        <a:t>Deneb</a:t>
+                        <a:t>원금</a:t>
                       </a:r>
-                      <a:endParaRPr sz="850"/>
+                      <a:endParaRPr sz="800"/>
                     </a:p>
                   </a:txBody>
                   <a:tcPr marL="28800" marR="43200" marT="25200" marB="25200" anchor="b">
@@ -23158,7 +23159,7 @@
                         </a:spcAft>
                       </a:pPr>
                       <a:r>
-                        <a:rPr sz="850" b="1" lang="ko-KR" altLang="en-US">
+                        <a:rPr sz="800" b="1" lang="ko-KR" altLang="en-US">
                           <a:solidFill>
                             <a:srgbClr val="5C6573"/>
                           </a:solidFill>
@@ -23166,9 +23167,9 @@
                           <a:ea typeface="Noto Sans KR"/>
                           <a:cs typeface="Noto Sans KR"/>
                         </a:rPr>
-                        <a:t>QQQ 단독</a:t>
+                        <a:t>Deneb</a:t>
                       </a:r>
-                      <a:endParaRPr sz="850"/>
+                      <a:endParaRPr sz="800"/>
                     </a:p>
                   </a:txBody>
                   <a:tcPr marL="28800" marR="43200" marT="25200" marB="25200" anchor="b">
@@ -23205,7 +23206,54 @@
                         </a:spcAft>
                       </a:pPr>
                       <a:r>
-                        <a:rPr sz="850" b="1" lang="ko-KR" altLang="en-US">
+                        <a:rPr sz="800" b="1" lang="ko-KR" altLang="en-US">
+                          <a:solidFill>
+                            <a:srgbClr val="5C6573"/>
+                          </a:solidFill>
+                          <a:latin typeface="Noto Sans KR"/>
+                          <a:ea typeface="Noto Sans KR"/>
+                          <a:cs typeface="Noto Sans KR"/>
+                        </a:rPr>
+                        <a:t>QQQ 단독</a:t>
+                      </a:r>
+                      <a:endParaRPr sz="800"/>
+                    </a:p>
+                  </a:txBody>
+                  <a:tcPr marL="28800" marR="43200" marT="25200" marB="25200" anchor="b">
+                    <a:lnL w="0">
+                      <a:noFill/>
+                    </a:lnL>
+                    <a:lnR w="0">
+                      <a:noFill/>
+                    </a:lnR>
+                    <a:lnT w="9525">
+                      <a:solidFill>
+                        <a:srgbClr val="1A1E25"/>
+                      </a:solidFill>
+                    </a:lnT>
+                    <a:lnB w="9525">
+                      <a:solidFill>
+                        <a:srgbClr val="1A1E25"/>
+                      </a:solidFill>
+                    </a:lnB>
+                    <a:noFill/>
+                  </a:tcPr>
+                </a:tc>
+                <a:tc>
+                  <a:txBody>
+                    <a:bodyPr wrap="square"/>
+                    <a:lstStyle/>
+                    <a:p>
+                      <a:pPr algn="l" eaLnBrk="0">
+                        <a:lnSpc>
+                          <a:spcPct val="112000"/>
+                        </a:lnSpc>
+                        <a:spcAft>
+                          <a:spcPts val="0"/>
+                        </a:spcAft>
+                      </a:pPr>
+                      <a:r>
+                        <a:rPr sz="800" b="1" lang="ko-KR" altLang="en-US">
                           <a:solidFill>
                             <a:srgbClr val="5C6573"/>
                           </a:solidFill>
@@ -23215,7 +23263,7 @@
                         </a:rPr>
                         <a:t>Polaris</a:t>
                       </a:r>
-                      <a:endParaRPr sz="850"/>
+                      <a:endParaRPr sz="800"/>
                     </a:p>
                   </a:txBody>
                   <a:tcPr marL="28800" marR="43200" marT="25200" marB="25200" anchor="b">
@@ -23254,7 +23302,7 @@
                         </a:spcAft>
                       </a:pPr>
                       <a:r>
-                        <a:rPr sz="900" b="1" lang="ko-KR" altLang="en-US">
+                        <a:rPr sz="850" b="1" lang="ko-KR" altLang="en-US">
                           <a:solidFill>
                             <a:srgbClr val="1A1E25"/>
                           </a:solidFill>
@@ -23262,9 +23310,9 @@
                           <a:ea typeface="Noto Sans KR"/>
                           <a:cs typeface="Noto Sans KR"/>
                         </a:rPr>
-                        <a:t>2015년 12월</a:t>
+                        <a:t>2015.12</a:t>
                       </a:r>
-                      <a:endParaRPr sz="900"/>
+                      <a:endParaRPr sz="850"/>
                     </a:p>
                   </a:txBody>
                   <a:tcPr marL="28800" marR="43200" marT="25200" marB="25200" anchor="ctr">
@@ -23299,7 +23347,7 @@
                         </a:spcAft>
                       </a:pPr>
                       <a:r>
-                        <a:rPr sz="900" b="0" lang="ko-KR" altLang="en-US">
+                        <a:rPr sz="850" b="0" lang="ko-KR" altLang="en-US">
                           <a:solidFill>
                             <a:srgbClr val="1A1E25"/>
                           </a:solidFill>
@@ -23307,9 +23355,9 @@
                           <a:ea typeface="Noto Sans KR"/>
                           <a:cs typeface="Noto Sans KR"/>
                         </a:rPr>
-                        <a:t>480</a:t>
+                        <a:t>4년</a:t>
                       </a:r>
-                      <a:endParaRPr sz="900"/>
+                      <a:endParaRPr sz="850"/>
                     </a:p>
                   </a:txBody>
                   <a:tcPr marL="28800" marR="43200" marT="25200" marB="25200" anchor="ctr">
@@ -23344,7 +23392,7 @@
                         </a:spcAft>
                       </a:pPr>
                       <a:r>
-                        <a:rPr sz="900" b="0" lang="ko-KR" altLang="en-US">
+                        <a:rPr sz="850" b="0" lang="ko-KR" altLang="en-US">
                           <a:solidFill>
                             <a:srgbClr val="1A1E25"/>
                           </a:solidFill>
@@ -23352,9 +23400,9 @@
                           <a:ea typeface="Noto Sans KR"/>
                           <a:cs typeface="Noto Sans KR"/>
                         </a:rPr>
-                        <a:t>709</a:t>
+                        <a:t>480</a:t>
                       </a:r>
-                      <a:endParaRPr sz="900"/>
+                      <a:endParaRPr sz="850"/>
                     </a:p>
                   </a:txBody>
                   <a:tcPr marL="28800" marR="43200" marT="25200" marB="25200" anchor="ctr">
@@ -23389,7 +23437,7 @@
                         </a:spcAft>
                       </a:pPr>
                       <a:r>
-                        <a:rPr sz="900" b="0" lang="ko-KR" altLang="en-US">
+                        <a:rPr sz="850" b="0" lang="ko-KR" altLang="en-US">
                           <a:solidFill>
                             <a:srgbClr val="1A1E25"/>
                           </a:solidFill>
@@ -23397,9 +23445,9 @@
                           <a:ea typeface="Noto Sans KR"/>
                           <a:cs typeface="Noto Sans KR"/>
                         </a:rPr>
-                        <a:t>679</a:t>
+                        <a:t>709</a:t>
                       </a:r>
-                      <a:endParaRPr sz="900"/>
+                      <a:endParaRPr sz="850"/>
                     </a:p>
                   </a:txBody>
                   <a:tcPr marL="28800" marR="43200" marT="25200" marB="25200" anchor="ctr">
@@ -23434,7 +23482,52 @@
                         </a:spcAft>
                       </a:pPr>
                       <a:r>
-                        <a:rPr sz="900" b="0" lang="ko-KR" altLang="en-US">
+                        <a:rPr sz="850" b="0" lang="ko-KR" altLang="en-US">
+                          <a:solidFill>
+                            <a:srgbClr val="1A1E25"/>
+                          </a:solidFill>
+                          <a:latin typeface="Noto Sans KR"/>
+                          <a:ea typeface="Noto Sans KR"/>
+                          <a:cs typeface="Noto Sans KR"/>
+                        </a:rPr>
+                        <a:t>679</a:t>
+                      </a:r>
+                      <a:endParaRPr sz="850"/>
+                    </a:p>
+                  </a:txBody>
+                  <a:tcPr marL="28800" marR="43200" marT="25200" marB="25200" anchor="ctr">
+                    <a:lnL w="0">
+                      <a:noFill/>
+                    </a:lnL>
+                    <a:lnR w="0">
+                      <a:noFill/>
+                    </a:lnR>
+                    <a:lnT w="0">
+                      <a:noFill/>
+                    </a:lnT>
+                    <a:lnB w="6350">
+                      <a:solidFill>
+                        <a:srgbClr val="C9D0DA"/>
+                      </a:solidFill>
+                    </a:lnB>
+                    <a:noFill/>
+                  </a:tcPr>
+                </a:tc>
+                <a:tc>
+                  <a:txBody>
+                    <a:bodyPr wrap="square"/>
+                    <a:lstStyle/>
+                    <a:p>
+                      <a:pPr algn="l" eaLnBrk="0">
+                        <a:lnSpc>
+                          <a:spcPct val="112000"/>
+                        </a:lnSpc>
+                        <a:spcAft>
+                          <a:spcPts val="0"/>
+                        </a:spcAft>
+                      </a:pPr>
+                      <a:r>
+                        <a:rPr sz="850" b="0" lang="ko-KR" altLang="en-US">
                           <a:solidFill>
                             <a:srgbClr val="1A1E25"/>
                           </a:solidFill>
@@ -23444,7 +23537,7 @@
                         </a:rPr>
                         <a:t>546</a:t>
                       </a:r>
-                      <a:endParaRPr sz="900"/>
+                      <a:endParaRPr sz="850"/>
                     </a:p>
                   </a:txBody>
                   <a:tcPr marL="28800" marR="43200" marT="25200" marB="25200" anchor="ctr">
@@ -23481,7 +23574,7 @@
                         </a:spcAft>
                       </a:pPr>
                       <a:r>
-                        <a:rPr sz="900" b="1" lang="ko-KR" altLang="en-US">
+                        <a:rPr sz="850" b="1" lang="ko-KR" altLang="en-US">
                           <a:solidFill>
                             <a:srgbClr val="1A1E25"/>
                           </a:solidFill>
@@ -23489,9 +23582,9 @@
                           <a:ea typeface="Noto Sans KR"/>
                           <a:cs typeface="Noto Sans KR"/>
                         </a:rPr>
-                        <a:t>2019년 12월</a:t>
+                        <a:t>2019.12</a:t>
                       </a:r>
-                      <a:endParaRPr sz="900"/>
+                      <a:endParaRPr sz="850"/>
                     </a:p>
                   </a:txBody>
                   <a:tcPr marL="28800" marR="43200" marT="25200" marB="25200" anchor="ctr">
@@ -23526,7 +23619,7 @@
                         </a:spcAft>
                       </a:pPr>
                       <a:r>
-                        <a:rPr sz="900" b="0" lang="ko-KR" altLang="en-US">
+                        <a:rPr sz="850" b="0" lang="ko-KR" altLang="en-US">
                           <a:solidFill>
                             <a:srgbClr val="1A1E25"/>
                           </a:solidFill>
@@ -23534,9 +23627,9 @@
                           <a:ea typeface="Noto Sans KR"/>
                           <a:cs typeface="Noto Sans KR"/>
                         </a:rPr>
-                        <a:t>960</a:t>
+                        <a:t>8년</a:t>
                       </a:r>
-                      <a:endParaRPr sz="900"/>
+                      <a:endParaRPr sz="850"/>
                     </a:p>
                   </a:txBody>
                   <a:tcPr marL="28800" marR="43200" marT="25200" marB="25200" anchor="ctr">
@@ -23571,7 +23664,7 @@
                         </a:spcAft>
                       </a:pPr>
                       <a:r>
-                        <a:rPr sz="900" b="0" lang="ko-KR" altLang="en-US">
+                        <a:rPr sz="850" b="0" lang="ko-KR" altLang="en-US">
                           <a:solidFill>
                             <a:srgbClr val="1A1E25"/>
                           </a:solidFill>
@@ -23579,9 +23672,9 @@
                           <a:ea typeface="Noto Sans KR"/>
                           <a:cs typeface="Noto Sans KR"/>
                         </a:rPr>
-                        <a:t>3,046</a:t>
+                        <a:t>960</a:t>
                       </a:r>
-                      <a:endParaRPr sz="900"/>
+                      <a:endParaRPr sz="850"/>
                     </a:p>
                   </a:txBody>
                   <a:tcPr marL="28800" marR="43200" marT="25200" marB="25200" anchor="ctr">
@@ -23616,7 +23709,7 @@
                         </a:spcAft>
                       </a:pPr>
                       <a:r>
-                        <a:rPr sz="900" b="0" lang="ko-KR" altLang="en-US">
+                        <a:rPr sz="850" b="0" lang="ko-KR" altLang="en-US">
                           <a:solidFill>
                             <a:srgbClr val="1A1E25"/>
                           </a:solidFill>
@@ -23624,9 +23717,9 @@
                           <a:ea typeface="Noto Sans KR"/>
                           <a:cs typeface="Noto Sans KR"/>
                         </a:rPr>
-                        <a:t>2,056</a:t>
+                        <a:t>3,046</a:t>
                       </a:r>
-                      <a:endParaRPr sz="900"/>
+                      <a:endParaRPr sz="850"/>
                     </a:p>
                   </a:txBody>
                   <a:tcPr marL="28800" marR="43200" marT="25200" marB="25200" anchor="ctr">
@@ -23661,7 +23754,52 @@
                         </a:spcAft>
                       </a:pPr>
                       <a:r>
-                        <a:rPr sz="900" b="0" lang="ko-KR" altLang="en-US">
+                        <a:rPr sz="850" b="0" lang="ko-KR" altLang="en-US">
+                          <a:solidFill>
+                            <a:srgbClr val="1A1E25"/>
+                          </a:solidFill>
+                          <a:latin typeface="Noto Sans KR"/>
+                          <a:ea typeface="Noto Sans KR"/>
+                          <a:cs typeface="Noto Sans KR"/>
+                        </a:rPr>
+                        <a:t>2,056</a:t>
+                      </a:r>
+                      <a:endParaRPr sz="850"/>
+                    </a:p>
+                  </a:txBody>
+                  <a:tcPr marL="28800" marR="43200" marT="25200" marB="25200" anchor="ctr">
+                    <a:lnL w="0">
+                      <a:noFill/>
+                    </a:lnL>
+                    <a:lnR w="0">
+                      <a:noFill/>
+                    </a:lnR>
+                    <a:lnT w="0">
+                      <a:noFill/>
+                    </a:lnT>
+                    <a:lnB w="6350">
+                      <a:solidFill>
+                        <a:srgbClr val="C9D0DA"/>
+                      </a:solidFill>
+                    </a:lnB>
+                    <a:noFill/>
+                  </a:tcPr>
+                </a:tc>
+                <a:tc>
+                  <a:txBody>
+                    <a:bodyPr wrap="square"/>
+                    <a:lstStyle/>
+                    <a:p>
+                      <a:pPr algn="l" eaLnBrk="0">
+                        <a:lnSpc>
+                          <a:spcPct val="112000"/>
+                        </a:lnSpc>
+                        <a:spcAft>
+                          <a:spcPts val="0"/>
+                        </a:spcAft>
+                      </a:pPr>
+                      <a:r>
+                        <a:rPr sz="850" b="0" lang="ko-KR" altLang="en-US">
                           <a:solidFill>
                             <a:srgbClr val="1A1E25"/>
                           </a:solidFill>
@@ -23671,7 +23809,7 @@
                         </a:rPr>
                         <a:t>1,493</a:t>
                       </a:r>
-                      <a:endParaRPr sz="900"/>
+                      <a:endParaRPr sz="850"/>
                     </a:p>
                   </a:txBody>
                   <a:tcPr marL="28800" marR="43200" marT="25200" marB="25200" anchor="ctr">
@@ -23708,7 +23846,7 @@
                         </a:spcAft>
                       </a:pPr>
                       <a:r>
-                        <a:rPr sz="900" b="1" lang="ko-KR" altLang="en-US">
+                        <a:rPr sz="850" b="1" lang="ko-KR" altLang="en-US">
                           <a:solidFill>
                             <a:srgbClr val="1A1E25"/>
                           </a:solidFill>
@@ -23716,9 +23854,9 @@
                           <a:ea typeface="Noto Sans KR"/>
                           <a:cs typeface="Noto Sans KR"/>
                         </a:rPr>
-                        <a:t>2021년 12월</a:t>
+                        <a:t>2021.12</a:t>
                       </a:r>
-                      <a:endParaRPr sz="900"/>
+                      <a:endParaRPr sz="850"/>
                     </a:p>
                   </a:txBody>
                   <a:tcPr marL="28800" marR="43200" marT="25200" marB="25200" anchor="ctr">
@@ -23753,7 +23891,7 @@
                         </a:spcAft>
                       </a:pPr>
                       <a:r>
-                        <a:rPr sz="900" b="0" lang="ko-KR" altLang="en-US">
+                        <a:rPr sz="850" b="0" lang="ko-KR" altLang="en-US">
                           <a:solidFill>
                             <a:srgbClr val="1A1E25"/>
                           </a:solidFill>
@@ -23761,9 +23899,9 @@
                           <a:ea typeface="Noto Sans KR"/>
                           <a:cs typeface="Noto Sans KR"/>
                         </a:rPr>
-                        <a:t>1,200</a:t>
+                        <a:t>10년</a:t>
                       </a:r>
-                      <a:endParaRPr sz="900"/>
+                      <a:endParaRPr sz="850"/>
                     </a:p>
                   </a:txBody>
                   <a:tcPr marL="28800" marR="43200" marT="25200" marB="25200" anchor="ctr">
@@ -23798,7 +23936,7 @@
                         </a:spcAft>
                       </a:pPr>
                       <a:r>
-                        <a:rPr sz="900" b="0" lang="ko-KR" altLang="en-US">
+                        <a:rPr sz="850" b="0" lang="ko-KR" altLang="en-US">
                           <a:solidFill>
                             <a:srgbClr val="1A1E25"/>
                           </a:solidFill>
@@ -23806,9 +23944,9 @@
                           <a:ea typeface="Noto Sans KR"/>
                           <a:cs typeface="Noto Sans KR"/>
                         </a:rPr>
-                        <a:t>10,450</a:t>
+                        <a:t>1,200</a:t>
                       </a:r>
-                      <a:endParaRPr sz="900"/>
+                      <a:endParaRPr sz="850"/>
                     </a:p>
                   </a:txBody>
                   <a:tcPr marL="28800" marR="43200" marT="25200" marB="25200" anchor="ctr">
@@ -23843,7 +23981,7 @@
                         </a:spcAft>
                       </a:pPr>
                       <a:r>
-                        <a:rPr sz="900" b="0" lang="ko-KR" altLang="en-US">
+                        <a:rPr sz="850" b="0" lang="ko-KR" altLang="en-US">
                           <a:solidFill>
                             <a:srgbClr val="1A1E25"/>
                           </a:solidFill>
@@ -23851,9 +23989,9 @@
                           <a:ea typeface="Noto Sans KR"/>
                           <a:cs typeface="Noto Sans KR"/>
                         </a:rPr>
-                        <a:t>4,226</a:t>
+                        <a:t>10,450</a:t>
                       </a:r>
-                      <a:endParaRPr sz="900"/>
+                      <a:endParaRPr sz="850"/>
                     </a:p>
                   </a:txBody>
                   <a:tcPr marL="28800" marR="43200" marT="25200" marB="25200" anchor="ctr">
@@ -23888,7 +24026,52 @@
                         </a:spcAft>
                       </a:pPr>
                       <a:r>
-                        <a:rPr sz="900" b="0" lang="ko-KR" altLang="en-US">
+                        <a:rPr sz="850" b="0" lang="ko-KR" altLang="en-US">
+                          <a:solidFill>
+                            <a:srgbClr val="1A1E25"/>
+                          </a:solidFill>
+                          <a:latin typeface="Noto Sans KR"/>
+                          <a:ea typeface="Noto Sans KR"/>
+                          <a:cs typeface="Noto Sans KR"/>
+                        </a:rPr>
+                        <a:t>4,226</a:t>
+                      </a:r>
+                      <a:endParaRPr sz="850"/>
+                    </a:p>
+                  </a:txBody>
+                  <a:tcPr marL="28800" marR="43200" marT="25200" marB="25200" anchor="ctr">
+                    <a:lnL w="0">
+                      <a:noFill/>
+                    </a:lnL>
+                    <a:lnR w="0">
+                      <a:noFill/>
+                    </a:lnR>
+                    <a:lnT w="0">
+                      <a:noFill/>
+                    </a:lnT>
+                    <a:lnB w="6350">
+                      <a:solidFill>
+                        <a:srgbClr val="C9D0DA"/>
+                      </a:solidFill>
+                    </a:lnB>
+                    <a:noFill/>
+                  </a:tcPr>
+                </a:tc>
+                <a:tc>
+                  <a:txBody>
+                    <a:bodyPr wrap="square"/>
+                    <a:lstStyle/>
+                    <a:p>
+                      <a:pPr algn="l" eaLnBrk="0">
+                        <a:lnSpc>
+                          <a:spcPct val="112000"/>
+                        </a:lnSpc>
+                        <a:spcAft>
+                          <a:spcPts val="0"/>
+                        </a:spcAft>
+                      </a:pPr>
+                      <a:r>
+                        <a:rPr sz="850" b="0" lang="ko-KR" altLang="en-US">
                           <a:solidFill>
                             <a:srgbClr val="1A1E25"/>
                           </a:solidFill>
@@ -23898,7 +24081,7 @@
                         </a:rPr>
                         <a:t>2,473</a:t>
                       </a:r>
-                      <a:endParaRPr sz="900"/>
+                      <a:endParaRPr sz="850"/>
                     </a:p>
                   </a:txBody>
                   <a:tcPr marL="28800" marR="43200" marT="25200" marB="25200" anchor="ctr">
@@ -23935,7 +24118,7 @@
                         </a:spcAft>
                       </a:pPr>
                       <a:r>
-                        <a:rPr sz="900" b="1" lang="ko-KR" altLang="en-US">
+                        <a:rPr sz="850" b="1" lang="ko-KR" altLang="en-US">
                           <a:solidFill>
                             <a:srgbClr val="1A1E25"/>
                           </a:solidFill>
@@ -23943,9 +24126,9 @@
                           <a:ea typeface="Noto Sans KR"/>
                           <a:cs typeface="Noto Sans KR"/>
                         </a:rPr>
-                        <a:t>2022년 12월</a:t>
+                        <a:t>2022.12</a:t>
                       </a:r>
-                      <a:endParaRPr sz="900"/>
+                      <a:endParaRPr sz="850"/>
                     </a:p>
                   </a:txBody>
                   <a:tcPr marL="28800" marR="43200" marT="25200" marB="25200" anchor="ctr">
@@ -23980,7 +24163,7 @@
                         </a:spcAft>
                       </a:pPr>
                       <a:r>
-                        <a:rPr sz="900" b="0" lang="ko-KR" altLang="en-US">
+                        <a:rPr sz="850" b="0" lang="ko-KR" altLang="en-US">
                           <a:solidFill>
                             <a:srgbClr val="1A1E25"/>
                           </a:solidFill>
@@ -23988,9 +24171,9 @@
                           <a:ea typeface="Noto Sans KR"/>
                           <a:cs typeface="Noto Sans KR"/>
                         </a:rPr>
-                        <a:t>1,320</a:t>
+                        <a:t>11년</a:t>
                       </a:r>
-                      <a:endParaRPr sz="900"/>
+                      <a:endParaRPr sz="850"/>
                     </a:p>
                   </a:txBody>
                   <a:tcPr marL="28800" marR="43200" marT="25200" marB="25200" anchor="ctr">
@@ -24025,7 +24208,7 @@
                         </a:spcAft>
                       </a:pPr>
                       <a:r>
-                        <a:rPr sz="900" b="0" lang="ko-KR" altLang="en-US">
+                        <a:rPr sz="850" b="0" lang="ko-KR" altLang="en-US">
                           <a:solidFill>
                             <a:srgbClr val="1A1E25"/>
                           </a:solidFill>
@@ -24033,9 +24216,9 @@
                           <a:ea typeface="Noto Sans KR"/>
                           <a:cs typeface="Noto Sans KR"/>
                         </a:rPr>
-                        <a:t>7,840</a:t>
+                        <a:t>1,320</a:t>
                       </a:r>
-                      <a:endParaRPr sz="900"/>
+                      <a:endParaRPr sz="850"/>
                     </a:p>
                   </a:txBody>
                   <a:tcPr marL="28800" marR="43200" marT="25200" marB="25200" anchor="ctr">
@@ -24070,7 +24253,7 @@
                         </a:spcAft>
                       </a:pPr>
                       <a:r>
-                        <a:rPr sz="900" b="0" lang="ko-KR" altLang="en-US">
+                        <a:rPr sz="850" b="0" lang="ko-KR" altLang="en-US">
                           <a:solidFill>
                             <a:srgbClr val="1A1E25"/>
                           </a:solidFill>
@@ -24078,9 +24261,9 @@
                           <a:ea typeface="Noto Sans KR"/>
                           <a:cs typeface="Noto Sans KR"/>
                         </a:rPr>
-                        <a:t>2,951</a:t>
+                        <a:t>7,840</a:t>
                       </a:r>
-                      <a:endParaRPr sz="900"/>
+                      <a:endParaRPr sz="850"/>
                     </a:p>
                   </a:txBody>
                   <a:tcPr marL="28800" marR="43200" marT="25200" marB="25200" anchor="ctr">
@@ -24115,7 +24298,52 @@
                         </a:spcAft>
                       </a:pPr>
                       <a:r>
-                        <a:rPr sz="900" b="0" lang="ko-KR" altLang="en-US">
+                        <a:rPr sz="850" b="0" lang="ko-KR" altLang="en-US">
+                          <a:solidFill>
+                            <a:srgbClr val="1A1E25"/>
+                          </a:solidFill>
+                          <a:latin typeface="Noto Sans KR"/>
+                          <a:ea typeface="Noto Sans KR"/>
+                          <a:cs typeface="Noto Sans KR"/>
+                        </a:rPr>
+                        <a:t>2,951</a:t>
+                      </a:r>
+                      <a:endParaRPr sz="850"/>
+                    </a:p>
+                  </a:txBody>
+                  <a:tcPr marL="28800" marR="43200" marT="25200" marB="25200" anchor="ctr">
+                    <a:lnL w="0">
+                      <a:noFill/>
+                    </a:lnL>
+                    <a:lnR w="0">
+                      <a:noFill/>
+                    </a:lnR>
+                    <a:lnT w="0">
+                      <a:noFill/>
+                    </a:lnT>
+                    <a:lnB w="6350">
+                      <a:solidFill>
+                        <a:srgbClr val="C9D0DA"/>
+                      </a:solidFill>
+                    </a:lnB>
+                    <a:noFill/>
+                  </a:tcPr>
+                </a:tc>
+                <a:tc>
+                  <a:txBody>
+                    <a:bodyPr wrap="square"/>
+                    <a:lstStyle/>
+                    <a:p>
+                      <a:pPr algn="l" eaLnBrk="0">
+                        <a:lnSpc>
+                          <a:spcPct val="112000"/>
+                        </a:lnSpc>
+                        <a:spcAft>
+                          <a:spcPts val="0"/>
+                        </a:spcAft>
+                      </a:pPr>
+                      <a:r>
+                        <a:rPr sz="850" b="0" lang="ko-KR" altLang="en-US">
                           <a:solidFill>
                             <a:srgbClr val="1A1E25"/>
                           </a:solidFill>
@@ -24125,7 +24353,7 @@
                         </a:rPr>
                         <a:t>2,120</a:t>
                       </a:r>
-                      <a:endParaRPr sz="900"/>
+                      <a:endParaRPr sz="850"/>
                     </a:p>
                   </a:txBody>
                   <a:tcPr marL="28800" marR="43200" marT="25200" marB="25200" anchor="ctr">
@@ -24162,7 +24390,7 @@
                         </a:spcAft>
                       </a:pPr>
                       <a:r>
-                        <a:rPr sz="900" b="1" lang="ko-KR" altLang="en-US">
+                        <a:rPr sz="850" b="1" lang="ko-KR" altLang="en-US">
                           <a:solidFill>
                             <a:srgbClr val="1A1E25"/>
                           </a:solidFill>
@@ -24170,9 +24398,9 @@
                           <a:ea typeface="Noto Sans KR"/>
                           <a:cs typeface="Noto Sans KR"/>
                         </a:rPr>
-                        <a:t>2026년 08월</a:t>
+                        <a:t>2026.08</a:t>
                       </a:r>
-                      <a:endParaRPr sz="900"/>
+                      <a:endParaRPr sz="850"/>
                     </a:p>
                   </a:txBody>
                   <a:tcPr marL="28800" marR="43200" marT="25200" marB="25200" anchor="ctr">
@@ -24207,7 +24435,7 @@
                         </a:spcAft>
                       </a:pPr>
                       <a:r>
-                        <a:rPr sz="900" b="0" lang="ko-KR" altLang="en-US">
+                        <a:rPr sz="850" b="0" lang="ko-KR" altLang="en-US">
                           <a:solidFill>
                             <a:srgbClr val="1A1E25"/>
                           </a:solidFill>
@@ -24215,9 +24443,9 @@
                           <a:ea typeface="Noto Sans KR"/>
                           <a:cs typeface="Noto Sans KR"/>
                         </a:rPr>
-                        <a:t>1,760</a:t>
+                        <a:t>14년 8개월</a:t>
                       </a:r>
-                      <a:endParaRPr sz="900"/>
+                      <a:endParaRPr sz="850"/>
                     </a:p>
                   </a:txBody>
                   <a:tcPr marL="28800" marR="43200" marT="25200" marB="25200" anchor="ctr">
@@ -24252,7 +24480,7 @@
                         </a:spcAft>
                       </a:pPr>
                       <a:r>
-                        <a:rPr sz="900" b="0" lang="ko-KR" altLang="en-US">
+                        <a:rPr sz="850" b="0" lang="ko-KR" altLang="en-US">
                           <a:solidFill>
                             <a:srgbClr val="1A1E25"/>
                           </a:solidFill>
@@ -24260,9 +24488,9 @@
                           <a:ea typeface="Noto Sans KR"/>
                           <a:cs typeface="Noto Sans KR"/>
                         </a:rPr>
-                        <a:t>36,111</a:t>
+                        <a:t>1,760</a:t>
                       </a:r>
-                      <a:endParaRPr sz="900"/>
+                      <a:endParaRPr sz="850"/>
                     </a:p>
                   </a:txBody>
                   <a:tcPr marL="28800" marR="43200" marT="25200" marB="25200" anchor="ctr">
@@ -24297,7 +24525,7 @@
                         </a:spcAft>
                       </a:pPr>
                       <a:r>
-                        <a:rPr sz="900" b="0" lang="ko-KR" altLang="en-US">
+                        <a:rPr sz="850" b="0" lang="ko-KR" altLang="en-US">
                           <a:solidFill>
                             <a:srgbClr val="1A1E25"/>
                           </a:solidFill>
@@ -24305,9 +24533,9 @@
                           <a:ea typeface="Noto Sans KR"/>
                           <a:cs typeface="Noto Sans KR"/>
                         </a:rPr>
-                        <a:t>8,805</a:t>
+                        <a:t>36,111</a:t>
                       </a:r>
-                      <a:endParaRPr sz="900"/>
+                      <a:endParaRPr sz="850"/>
                     </a:p>
                   </a:txBody>
                   <a:tcPr marL="28800" marR="43200" marT="25200" marB="25200" anchor="ctr">
@@ -24342,7 +24570,52 @@
                         </a:spcAft>
                       </a:pPr>
                       <a:r>
-                        <a:rPr sz="900" b="0" lang="ko-KR" altLang="en-US">
+                        <a:rPr sz="850" b="0" lang="ko-KR" altLang="en-US">
+                          <a:solidFill>
+                            <a:srgbClr val="1A1E25"/>
+                          </a:solidFill>
+                          <a:latin typeface="Noto Sans KR"/>
+                          <a:ea typeface="Noto Sans KR"/>
+                          <a:cs typeface="Noto Sans KR"/>
+                        </a:rPr>
+                        <a:t>8,805</a:t>
+                      </a:r>
+                      <a:endParaRPr sz="850"/>
+                    </a:p>
+                  </a:txBody>
+                  <a:tcPr marL="28800" marR="43200" marT="25200" marB="25200" anchor="ctr">
+                    <a:lnL w="0">
+                      <a:noFill/>
+                    </a:lnL>
+                    <a:lnR w="0">
+                      <a:noFill/>
+                    </a:lnR>
+                    <a:lnT w="0">
+                      <a:noFill/>
+                    </a:lnT>
+                    <a:lnB w="6350">
+                      <a:solidFill>
+                        <a:srgbClr val="C9D0DA"/>
+                      </a:solidFill>
+                    </a:lnB>
+                    <a:noFill/>
+                  </a:tcPr>
+                </a:tc>
+                <a:tc>
+                  <a:txBody>
+                    <a:bodyPr wrap="square"/>
+                    <a:lstStyle/>
+                    <a:p>
+                      <a:pPr algn="l" eaLnBrk="0">
+                        <a:lnSpc>
+                          <a:spcPct val="112000"/>
+                        </a:lnSpc>
+                        <a:spcAft>
+                          <a:spcPts val="0"/>
+                        </a:spcAft>
+                      </a:pPr>
+                      <a:r>
+                        <a:rPr sz="850" b="0" lang="ko-KR" altLang="en-US">
                           <a:solidFill>
                             <a:srgbClr val="1A1E25"/>
                           </a:solidFill>
@@ -24352,7 +24625,7 @@
                         </a:rPr>
                         <a:t>5,077</a:t>
                       </a:r>
-                      <a:endParaRPr sz="900"/>
+                      <a:endParaRPr sz="850"/>
                     </a:p>
                   </a:txBody>
                   <a:tcPr marL="28800" marR="43200" marT="25200" marB="25200" anchor="ctr">
@@ -24386,7 +24659,7 @@
         </p:nvSpPr>
         <p:spPr>
           <a:xfrm>
-            <a:off x="558000" y="5850000"/>
+            <a:off x="558000" y="5940000"/>
             <a:ext cx="3006000" cy="1080000"/>
           </a:xfrm>
           <a:prstGeom prst="rect">
@@ -27876,7 +28149,7 @@
                 <a:ea typeface="Noto Sans KR"/>
                 <a:cs typeface="Noto Sans KR"/>
               </a:rPr>
-              <a:t>QQQ 단독 적립과 비교 · 월 10만 원</a:t>
+              <a:t>14년 8개월 적립 후 · 월 10만 원</a:t>
             </a:r>
           </a:p>
         </p:txBody>
@@ -27920,7 +28193,7 @@
                 <a:ea typeface="Noto Sans KR"/>
                 <a:cs typeface="Noto Sans KR"/>
               </a:rPr>
-              <a:t>2012-01 ~ 2026-08 · 원금 1,760만 원 · 세전</a:t>
+              <a:t>QQQ 단독 적립과 비교 · 2012-01 ~ 2026-08 · 원금 1,760만 원 · 세전</a:t>
             </a:r>
           </a:p>
         </p:txBody>
@@ -29702,7 +29975,7 @@
                 <a:ea typeface="Noto Sans KR"/>
                 <a:cs typeface="Noto Sans KR"/>
               </a:rPr>
-              <a:t>넣은 원금 대비 최종 금액</a:t>
+              <a:t>14년 8개월 적립 후 원금 대비 최종 금액</a:t>
             </a:r>
           </a:p>
         </p:txBody>
@@ -29746,7 +30019,7 @@
                 <a:ea typeface="Noto Sans KR"/>
                 <a:cs typeface="Noto Sans KR"/>
               </a:rPr>
-              <a:t>2026-08-31 · 몇 배가 됐나 · 금액과 무관 · 세전</a:t>
+              <a:t>2012-01 ~ 2026-08-31 · 몇 배가 됐나 · 금액과 무관 · 세전</a:t>
             </a:r>
           </a:p>
         </p:txBody>
@@ -29984,7 +30257,7 @@
                 <a:ea typeface="Noto Sans KR"/>
                 <a:cs typeface="Noto Sans KR"/>
               </a:rPr>
-              <a:t>납입액별 최종 금액 — Deneb · Polaris · QQQ 단독 적립 · 적금 3% · 적금 4%</a:t>
+              <a:t>14년 8개월 적립 후 납입액별 최종 금액 — Deneb · Polaris · QQQ 단독 적립 · 적금 3% · 적금 4%</a:t>
             </a:r>
           </a:p>
         </p:txBody>

--- a/reports/deneb_polaris_report_20261017/blue_manual/Deneb_Polaris_설명서_파랑_시안6쪽.pptx
+++ b/reports/deneb_polaris_report_20261017/blue_manual/Deneb_Polaris_설명서_파랑_시안6쪽.pptx
@@ -11982,20 +11982,6 @@
             </a:solidFill>
           </a:ln>
         </p:spPr>
-        <p:style>
-          <a:lnRef idx="2">
-            <a:schemeClr val="accent1"/>
-          </a:lnRef>
-          <a:fillRef idx="0">
-            <a:schemeClr val="accent1"/>
-          </a:fillRef>
-          <a:effectRef idx="1">
-            <a:schemeClr val="accent1"/>
-          </a:effectRef>
-          <a:fontRef idx="minor">
-            <a:schemeClr val="tx1"/>
-          </a:fontRef>
-        </p:style>
       </p:cxnSp>
       <p:cxnSp>
         <p:nvCxnSpPr>
@@ -12017,20 +12003,6 @@
             </a:solidFill>
           </a:ln>
         </p:spPr>
-        <p:style>
-          <a:lnRef idx="2">
-            <a:schemeClr val="accent1"/>
-          </a:lnRef>
-          <a:fillRef idx="0">
-            <a:schemeClr val="accent1"/>
-          </a:fillRef>
-          <a:effectRef idx="1">
-            <a:schemeClr val="accent1"/>
-          </a:effectRef>
-          <a:fontRef idx="minor">
-            <a:schemeClr val="tx1"/>
-          </a:fontRef>
-        </p:style>
       </p:cxnSp>
       <p:sp>
         <p:nvSpPr>
@@ -12423,20 +12395,6 @@
             </a:solidFill>
           </a:ln>
         </p:spPr>
-        <p:style>
-          <a:lnRef idx="2">
-            <a:schemeClr val="accent1"/>
-          </a:lnRef>
-          <a:fillRef idx="0">
-            <a:schemeClr val="accent1"/>
-          </a:fillRef>
-          <a:effectRef idx="1">
-            <a:schemeClr val="accent1"/>
-          </a:effectRef>
-          <a:fontRef idx="minor">
-            <a:schemeClr val="tx1"/>
-          </a:fontRef>
-        </p:style>
       </p:cxnSp>
       <p:sp>
         <p:nvSpPr>
@@ -12713,20 +12671,6 @@
             </a:solidFill>
           </a:ln>
         </p:spPr>
-        <p:style>
-          <a:lnRef idx="2">
-            <a:schemeClr val="accent1"/>
-          </a:lnRef>
-          <a:fillRef idx="0">
-            <a:schemeClr val="accent1"/>
-          </a:fillRef>
-          <a:effectRef idx="1">
-            <a:schemeClr val="accent1"/>
-          </a:effectRef>
-          <a:fontRef idx="minor">
-            <a:schemeClr val="tx1"/>
-          </a:fontRef>
-        </p:style>
       </p:cxnSp>
       <p:sp>
         <p:nvSpPr>
@@ -13600,20 +13544,6 @@
             </a:solidFill>
           </a:ln>
         </p:spPr>
-        <p:style>
-          <a:lnRef idx="2">
-            <a:schemeClr val="accent1"/>
-          </a:lnRef>
-          <a:fillRef idx="0">
-            <a:schemeClr val="accent1"/>
-          </a:fillRef>
-          <a:effectRef idx="1">
-            <a:schemeClr val="accent1"/>
-          </a:effectRef>
-          <a:fontRef idx="minor">
-            <a:schemeClr val="tx1"/>
-          </a:fontRef>
-        </p:style>
       </p:cxnSp>
       <p:sp>
         <p:nvSpPr>
@@ -14199,20 +14129,6 @@
             </a:solidFill>
           </a:ln>
         </p:spPr>
-        <p:style>
-          <a:lnRef idx="2">
-            <a:schemeClr val="accent1"/>
-          </a:lnRef>
-          <a:fillRef idx="0">
-            <a:schemeClr val="accent1"/>
-          </a:fillRef>
-          <a:effectRef idx="1">
-            <a:schemeClr val="accent1"/>
-          </a:effectRef>
-          <a:fontRef idx="minor">
-            <a:schemeClr val="tx1"/>
-          </a:fontRef>
-        </p:style>
       </p:cxnSp>
       <p:cxnSp>
         <p:nvCxnSpPr>
@@ -14234,20 +14150,6 @@
             </a:solidFill>
           </a:ln>
         </p:spPr>
-        <p:style>
-          <a:lnRef idx="2">
-            <a:schemeClr val="accent1"/>
-          </a:lnRef>
-          <a:fillRef idx="0">
-            <a:schemeClr val="accent1"/>
-          </a:fillRef>
-          <a:effectRef idx="1">
-            <a:schemeClr val="accent1"/>
-          </a:effectRef>
-          <a:fontRef idx="minor">
-            <a:schemeClr val="tx1"/>
-          </a:fontRef>
-        </p:style>
       </p:cxnSp>
       <p:sp>
         <p:nvSpPr>
@@ -14652,20 +14554,6 @@
             </a:solidFill>
           </a:ln>
         </p:spPr>
-        <p:style>
-          <a:lnRef idx="2">
-            <a:schemeClr val="accent1"/>
-          </a:lnRef>
-          <a:fillRef idx="0">
-            <a:schemeClr val="accent1"/>
-          </a:fillRef>
-          <a:effectRef idx="1">
-            <a:schemeClr val="accent1"/>
-          </a:effectRef>
-          <a:fontRef idx="minor">
-            <a:schemeClr val="tx1"/>
-          </a:fontRef>
-        </p:style>
       </p:cxnSp>
       <p:sp>
         <p:nvSpPr>
@@ -14793,20 +14681,6 @@
             </a:solidFill>
           </a:ln>
         </p:spPr>
-        <p:style>
-          <a:lnRef idx="2">
-            <a:schemeClr val="accent1"/>
-          </a:lnRef>
-          <a:fillRef idx="0">
-            <a:schemeClr val="accent1"/>
-          </a:fillRef>
-          <a:effectRef idx="1">
-            <a:schemeClr val="accent1"/>
-          </a:effectRef>
-          <a:fontRef idx="minor">
-            <a:schemeClr val="tx1"/>
-          </a:fontRef>
-        </p:style>
       </p:cxnSp>
       <p:sp>
         <p:nvSpPr>
@@ -18096,20 +17970,6 @@
             </a:solidFill>
           </a:ln>
         </p:spPr>
-        <p:style>
-          <a:lnRef idx="2">
-            <a:schemeClr val="accent1"/>
-          </a:lnRef>
-          <a:fillRef idx="0">
-            <a:schemeClr val="accent1"/>
-          </a:fillRef>
-          <a:effectRef idx="1">
-            <a:schemeClr val="accent1"/>
-          </a:effectRef>
-          <a:fontRef idx="minor">
-            <a:schemeClr val="tx1"/>
-          </a:fontRef>
-        </p:style>
       </p:cxnSp>
       <p:cxnSp>
         <p:nvCxnSpPr>
@@ -18131,20 +17991,6 @@
             </a:solidFill>
           </a:ln>
         </p:spPr>
-        <p:style>
-          <a:lnRef idx="2">
-            <a:schemeClr val="accent1"/>
-          </a:lnRef>
-          <a:fillRef idx="0">
-            <a:schemeClr val="accent1"/>
-          </a:fillRef>
-          <a:effectRef idx="1">
-            <a:schemeClr val="accent1"/>
-          </a:effectRef>
-          <a:fontRef idx="minor">
-            <a:schemeClr val="tx1"/>
-          </a:fontRef>
-        </p:style>
       </p:cxnSp>
       <p:sp>
         <p:nvSpPr>
@@ -18430,20 +18276,6 @@
             </a:solidFill>
           </a:ln>
         </p:spPr>
-        <p:style>
-          <a:lnRef idx="2">
-            <a:schemeClr val="accent1"/>
-          </a:lnRef>
-          <a:fillRef idx="0">
-            <a:schemeClr val="accent1"/>
-          </a:fillRef>
-          <a:effectRef idx="1">
-            <a:schemeClr val="accent1"/>
-          </a:effectRef>
-          <a:fontRef idx="minor">
-            <a:schemeClr val="tx1"/>
-          </a:fontRef>
-        </p:style>
       </p:cxnSp>
       <p:sp>
         <p:nvSpPr>
@@ -18571,20 +18403,6 @@
             </a:solidFill>
           </a:ln>
         </p:spPr>
-        <p:style>
-          <a:lnRef idx="2">
-            <a:schemeClr val="accent1"/>
-          </a:lnRef>
-          <a:fillRef idx="0">
-            <a:schemeClr val="accent1"/>
-          </a:fillRef>
-          <a:effectRef idx="1">
-            <a:schemeClr val="accent1"/>
-          </a:effectRef>
-          <a:fontRef idx="minor">
-            <a:schemeClr val="tx1"/>
-          </a:fontRef>
-        </p:style>
       </p:cxnSp>
       <p:sp>
         <p:nvSpPr>
@@ -21912,20 +21730,6 @@
             </a:solidFill>
           </a:ln>
         </p:spPr>
-        <p:style>
-          <a:lnRef idx="2">
-            <a:schemeClr val="accent1"/>
-          </a:lnRef>
-          <a:fillRef idx="0">
-            <a:schemeClr val="accent1"/>
-          </a:fillRef>
-          <a:effectRef idx="1">
-            <a:schemeClr val="accent1"/>
-          </a:effectRef>
-          <a:fontRef idx="minor">
-            <a:schemeClr val="tx1"/>
-          </a:fontRef>
-        </p:style>
       </p:cxnSp>
       <p:sp>
         <p:nvSpPr>
@@ -22002,20 +21806,6 @@
             </a:solidFill>
           </a:ln>
         </p:spPr>
-        <p:style>
-          <a:lnRef idx="2">
-            <a:schemeClr val="accent1"/>
-          </a:lnRef>
-          <a:fillRef idx="0">
-            <a:schemeClr val="accent1"/>
-          </a:fillRef>
-          <a:effectRef idx="1">
-            <a:schemeClr val="accent1"/>
-          </a:effectRef>
-          <a:fontRef idx="minor">
-            <a:schemeClr val="tx1"/>
-          </a:fontRef>
-        </p:style>
       </p:cxnSp>
       <p:sp>
         <p:nvSpPr>
@@ -22092,20 +21882,6 @@
             </a:solidFill>
           </a:ln>
         </p:spPr>
-        <p:style>
-          <a:lnRef idx="2">
-            <a:schemeClr val="accent1"/>
-          </a:lnRef>
-          <a:fillRef idx="0">
-            <a:schemeClr val="accent1"/>
-          </a:fillRef>
-          <a:effectRef idx="1">
-            <a:schemeClr val="accent1"/>
-          </a:effectRef>
-          <a:fontRef idx="minor">
-            <a:schemeClr val="tx1"/>
-          </a:fontRef>
-        </p:style>
       </p:cxnSp>
       <p:sp>
         <p:nvSpPr>
@@ -22519,20 +22295,6 @@
             </a:solidFill>
           </a:ln>
         </p:spPr>
-        <p:style>
-          <a:lnRef idx="2">
-            <a:schemeClr val="accent1"/>
-          </a:lnRef>
-          <a:fillRef idx="0">
-            <a:schemeClr val="accent1"/>
-          </a:fillRef>
-          <a:effectRef idx="1">
-            <a:schemeClr val="accent1"/>
-          </a:effectRef>
-          <a:fontRef idx="minor">
-            <a:schemeClr val="tx1"/>
-          </a:fontRef>
-        </p:style>
       </p:cxnSp>
       <p:cxnSp>
         <p:nvCxnSpPr>
@@ -22554,20 +22316,6 @@
             </a:solidFill>
           </a:ln>
         </p:spPr>
-        <p:style>
-          <a:lnRef idx="2">
-            <a:schemeClr val="accent1"/>
-          </a:lnRef>
-          <a:fillRef idx="0">
-            <a:schemeClr val="accent1"/>
-          </a:fillRef>
-          <a:effectRef idx="1">
-            <a:schemeClr val="accent1"/>
-          </a:effectRef>
-          <a:fontRef idx="minor">
-            <a:schemeClr val="tx1"/>
-          </a:fontRef>
-        </p:style>
       </p:cxnSp>
       <p:sp>
         <p:nvSpPr>
@@ -22874,20 +22622,6 @@
             </a:solidFill>
           </a:ln>
         </p:spPr>
-        <p:style>
-          <a:lnRef idx="2">
-            <a:schemeClr val="accent1"/>
-          </a:lnRef>
-          <a:fillRef idx="0">
-            <a:schemeClr val="accent1"/>
-          </a:fillRef>
-          <a:effectRef idx="1">
-            <a:schemeClr val="accent1"/>
-          </a:effectRef>
-          <a:fontRef idx="minor">
-            <a:schemeClr val="tx1"/>
-          </a:fontRef>
-        </p:style>
       </p:cxnSp>
       <p:sp>
         <p:nvSpPr>
@@ -24715,20 +24449,6 @@
             </a:solidFill>
           </a:ln>
         </p:spPr>
-        <p:style>
-          <a:lnRef idx="2">
-            <a:schemeClr val="accent1"/>
-          </a:lnRef>
-          <a:fillRef idx="0">
-            <a:schemeClr val="accent1"/>
-          </a:fillRef>
-          <a:effectRef idx="1">
-            <a:schemeClr val="accent1"/>
-          </a:effectRef>
-          <a:fontRef idx="minor">
-            <a:schemeClr val="tx1"/>
-          </a:fontRef>
-        </p:style>
       </p:cxnSp>
       <p:sp>
         <p:nvSpPr>
@@ -24795,20 +24515,6 @@
             <a:prstDash val="dash"/>
           </a:ln>
         </p:spPr>
-        <p:style>
-          <a:lnRef idx="2">
-            <a:schemeClr val="accent1"/>
-          </a:lnRef>
-          <a:fillRef idx="0">
-            <a:schemeClr val="accent1"/>
-          </a:fillRef>
-          <a:effectRef idx="1">
-            <a:schemeClr val="accent1"/>
-          </a:effectRef>
-          <a:fontRef idx="minor">
-            <a:schemeClr val="tx1"/>
-          </a:fontRef>
-        </p:style>
       </p:cxnSp>
       <p:sp>
         <p:nvSpPr>
@@ -24874,20 +24580,6 @@
             </a:solidFill>
           </a:ln>
         </p:spPr>
-        <p:style>
-          <a:lnRef idx="2">
-            <a:schemeClr val="accent1"/>
-          </a:lnRef>
-          <a:fillRef idx="0">
-            <a:schemeClr val="accent1"/>
-          </a:fillRef>
-          <a:effectRef idx="1">
-            <a:schemeClr val="accent1"/>
-          </a:effectRef>
-          <a:fontRef idx="minor">
-            <a:schemeClr val="tx1"/>
-          </a:fontRef>
-        </p:style>
       </p:cxnSp>
       <p:sp>
         <p:nvSpPr>
@@ -24954,20 +24646,6 @@
             <a:prstDash val="sysDash"/>
           </a:ln>
         </p:spPr>
-        <p:style>
-          <a:lnRef idx="2">
-            <a:schemeClr val="accent1"/>
-          </a:lnRef>
-          <a:fillRef idx="0">
-            <a:schemeClr val="accent1"/>
-          </a:fillRef>
-          <a:effectRef idx="1">
-            <a:schemeClr val="accent1"/>
-          </a:effectRef>
-          <a:fontRef idx="minor">
-            <a:schemeClr val="tx1"/>
-          </a:fontRef>
-        </p:style>
       </p:cxnSp>
       <p:sp>
         <p:nvSpPr>
@@ -25033,20 +24711,6 @@
             </a:solidFill>
           </a:ln>
         </p:spPr>
-        <p:style>
-          <a:lnRef idx="2">
-            <a:schemeClr val="accent1"/>
-          </a:lnRef>
-          <a:fillRef idx="0">
-            <a:schemeClr val="accent1"/>
-          </a:fillRef>
-          <a:effectRef idx="1">
-            <a:schemeClr val="accent1"/>
-          </a:effectRef>
-          <a:fontRef idx="minor">
-            <a:schemeClr val="tx1"/>
-          </a:fontRef>
-        </p:style>
       </p:cxnSp>
       <p:sp>
         <p:nvSpPr>
@@ -25174,20 +24838,6 @@
             </a:solidFill>
           </a:ln>
         </p:spPr>
-        <p:style>
-          <a:lnRef idx="2">
-            <a:schemeClr val="accent1"/>
-          </a:lnRef>
-          <a:fillRef idx="0">
-            <a:schemeClr val="accent1"/>
-          </a:fillRef>
-          <a:effectRef idx="1">
-            <a:schemeClr val="accent1"/>
-          </a:effectRef>
-          <a:fontRef idx="minor">
-            <a:schemeClr val="tx1"/>
-          </a:fontRef>
-        </p:style>
       </p:cxnSp>
       <p:sp>
         <p:nvSpPr>
@@ -25315,20 +24965,6 @@
             </a:solidFill>
           </a:ln>
         </p:spPr>
-        <p:style>
-          <a:lnRef idx="2">
-            <a:schemeClr val="accent1"/>
-          </a:lnRef>
-          <a:fillRef idx="0">
-            <a:schemeClr val="accent1"/>
-          </a:fillRef>
-          <a:effectRef idx="1">
-            <a:schemeClr val="accent1"/>
-          </a:effectRef>
-          <a:fontRef idx="minor">
-            <a:schemeClr val="tx1"/>
-          </a:fontRef>
-        </p:style>
       </p:cxnSp>
       <p:sp>
         <p:nvSpPr>
@@ -25456,20 +25092,6 @@
             </a:solidFill>
           </a:ln>
         </p:spPr>
-        <p:style>
-          <a:lnRef idx="2">
-            <a:schemeClr val="accent1"/>
-          </a:lnRef>
-          <a:fillRef idx="0">
-            <a:schemeClr val="accent1"/>
-          </a:fillRef>
-          <a:effectRef idx="1">
-            <a:schemeClr val="accent1"/>
-          </a:effectRef>
-          <a:fontRef idx="minor">
-            <a:schemeClr val="tx1"/>
-          </a:fontRef>
-        </p:style>
       </p:cxnSp>
       <p:sp>
         <p:nvSpPr>
@@ -25978,20 +25600,6 @@
             </a:solidFill>
           </a:ln>
         </p:spPr>
-        <p:style>
-          <a:lnRef idx="2">
-            <a:schemeClr val="accent1"/>
-          </a:lnRef>
-          <a:fillRef idx="0">
-            <a:schemeClr val="accent1"/>
-          </a:fillRef>
-          <a:effectRef idx="1">
-            <a:schemeClr val="accent1"/>
-          </a:effectRef>
-          <a:fontRef idx="minor">
-            <a:schemeClr val="tx1"/>
-          </a:fontRef>
-        </p:style>
       </p:cxnSp>
       <p:cxnSp>
         <p:nvCxnSpPr>
@@ -26013,20 +25621,6 @@
             </a:solidFill>
           </a:ln>
         </p:spPr>
-        <p:style>
-          <a:lnRef idx="2">
-            <a:schemeClr val="accent1"/>
-          </a:lnRef>
-          <a:fillRef idx="0">
-            <a:schemeClr val="accent1"/>
-          </a:fillRef>
-          <a:effectRef idx="1">
-            <a:schemeClr val="accent1"/>
-          </a:effectRef>
-          <a:fontRef idx="minor">
-            <a:schemeClr val="tx1"/>
-          </a:fontRef>
-        </p:style>
       </p:cxnSp>
       <p:sp>
         <p:nvSpPr>
@@ -26521,20 +26115,6 @@
             </a:solidFill>
           </a:ln>
         </p:spPr>
-        <p:style>
-          <a:lnRef idx="2">
-            <a:schemeClr val="accent1"/>
-          </a:lnRef>
-          <a:fillRef idx="0">
-            <a:schemeClr val="accent1"/>
-          </a:fillRef>
-          <a:effectRef idx="1">
-            <a:schemeClr val="accent1"/>
-          </a:effectRef>
-          <a:fontRef idx="minor">
-            <a:schemeClr val="tx1"/>
-          </a:fontRef>
-        </p:style>
       </p:cxnSp>
       <p:sp>
         <p:nvSpPr>
@@ -27954,20 +27534,6 @@
             </a:solidFill>
           </a:ln>
         </p:spPr>
-        <p:style>
-          <a:lnRef idx="2">
-            <a:schemeClr val="accent1"/>
-          </a:lnRef>
-          <a:fillRef idx="0">
-            <a:schemeClr val="accent1"/>
-          </a:fillRef>
-          <a:effectRef idx="1">
-            <a:schemeClr val="accent1"/>
-          </a:effectRef>
-          <a:fontRef idx="minor">
-            <a:schemeClr val="tx1"/>
-          </a:fontRef>
-        </p:style>
       </p:cxnSp>
       <p:sp>
         <p:nvSpPr>
@@ -28095,20 +27661,6 @@
             </a:solidFill>
           </a:ln>
         </p:spPr>
-        <p:style>
-          <a:lnRef idx="2">
-            <a:schemeClr val="accent1"/>
-          </a:lnRef>
-          <a:fillRef idx="0">
-            <a:schemeClr val="accent1"/>
-          </a:fillRef>
-          <a:effectRef idx="1">
-            <a:schemeClr val="accent1"/>
-          </a:effectRef>
-          <a:fontRef idx="minor">
-            <a:schemeClr val="tx1"/>
-          </a:fontRef>
-        </p:style>
       </p:cxnSp>
       <p:sp>
         <p:nvSpPr>
@@ -29587,20 +29139,6 @@
             </a:solidFill>
           </a:ln>
         </p:spPr>
-        <p:style>
-          <a:lnRef idx="2">
-            <a:schemeClr val="accent1"/>
-          </a:lnRef>
-          <a:fillRef idx="0">
-            <a:schemeClr val="accent1"/>
-          </a:fillRef>
-          <a:effectRef idx="1">
-            <a:schemeClr val="accent1"/>
-          </a:effectRef>
-          <a:fontRef idx="minor">
-            <a:schemeClr val="tx1"/>
-          </a:fontRef>
-        </p:style>
       </p:cxnSp>
       <p:cxnSp>
         <p:nvCxnSpPr>
@@ -29622,20 +29160,6 @@
             </a:solidFill>
           </a:ln>
         </p:spPr>
-        <p:style>
-          <a:lnRef idx="2">
-            <a:schemeClr val="accent1"/>
-          </a:lnRef>
-          <a:fillRef idx="0">
-            <a:schemeClr val="accent1"/>
-          </a:fillRef>
-          <a:effectRef idx="1">
-            <a:schemeClr val="accent1"/>
-          </a:effectRef>
-          <a:fontRef idx="minor">
-            <a:schemeClr val="tx1"/>
-          </a:fontRef>
-        </p:style>
       </p:cxnSp>
       <p:sp>
         <p:nvSpPr>
@@ -29921,20 +29445,6 @@
             </a:solidFill>
           </a:ln>
         </p:spPr>
-        <p:style>
-          <a:lnRef idx="2">
-            <a:schemeClr val="accent1"/>
-          </a:lnRef>
-          <a:fillRef idx="0">
-            <a:schemeClr val="accent1"/>
-          </a:fillRef>
-          <a:effectRef idx="1">
-            <a:schemeClr val="accent1"/>
-          </a:effectRef>
-          <a:fontRef idx="minor">
-            <a:schemeClr val="tx1"/>
-          </a:fontRef>
-        </p:style>
       </p:cxnSp>
       <p:sp>
         <p:nvSpPr>
@@ -30062,20 +29572,6 @@
             </a:solidFill>
           </a:ln>
         </p:spPr>
-        <p:style>
-          <a:lnRef idx="2">
-            <a:schemeClr val="accent1"/>
-          </a:lnRef>
-          <a:fillRef idx="0">
-            <a:schemeClr val="accent1"/>
-          </a:fillRef>
-          <a:effectRef idx="1">
-            <a:schemeClr val="accent1"/>
-          </a:effectRef>
-          <a:fontRef idx="minor">
-            <a:schemeClr val="tx1"/>
-          </a:fontRef>
-        </p:style>
       </p:cxnSp>
       <p:sp>
         <p:nvSpPr>
@@ -30203,20 +29699,6 @@
             </a:solidFill>
           </a:ln>
         </p:spPr>
-        <p:style>
-          <a:lnRef idx="2">
-            <a:schemeClr val="accent1"/>
-          </a:lnRef>
-          <a:fillRef idx="0">
-            <a:schemeClr val="accent1"/>
-          </a:fillRef>
-          <a:effectRef idx="1">
-            <a:schemeClr val="accent1"/>
-          </a:effectRef>
-          <a:fontRef idx="minor">
-            <a:schemeClr val="tx1"/>
-          </a:fontRef>
-        </p:style>
       </p:cxnSp>
       <p:sp>
         <p:nvSpPr>
@@ -33544,20 +33026,6 @@
             </a:solidFill>
           </a:ln>
         </p:spPr>
-        <p:style>
-          <a:lnRef idx="2">
-            <a:schemeClr val="accent1"/>
-          </a:lnRef>
-          <a:fillRef idx="0">
-            <a:schemeClr val="accent1"/>
-          </a:fillRef>
-          <a:effectRef idx="1">
-            <a:schemeClr val="accent1"/>
-          </a:effectRef>
-          <a:fontRef idx="minor">
-            <a:schemeClr val="tx1"/>
-          </a:fontRef>
-        </p:style>
       </p:cxnSp>
       <p:sp>
         <p:nvSpPr>
@@ -33634,20 +33102,6 @@
             </a:solidFill>
           </a:ln>
         </p:spPr>
-        <p:style>
-          <a:lnRef idx="2">
-            <a:schemeClr val="accent1"/>
-          </a:lnRef>
-          <a:fillRef idx="0">
-            <a:schemeClr val="accent1"/>
-          </a:fillRef>
-          <a:effectRef idx="1">
-            <a:schemeClr val="accent1"/>
-          </a:effectRef>
-          <a:fontRef idx="minor">
-            <a:schemeClr val="tx1"/>
-          </a:fontRef>
-        </p:style>
       </p:cxnSp>
       <p:sp>
         <p:nvSpPr>
@@ -33724,20 +33178,6 @@
             </a:solidFill>
           </a:ln>
         </p:spPr>
-        <p:style>
-          <a:lnRef idx="2">
-            <a:schemeClr val="accent1"/>
-          </a:lnRef>
-          <a:fillRef idx="0">
-            <a:schemeClr val="accent1"/>
-          </a:fillRef>
-          <a:effectRef idx="1">
-            <a:schemeClr val="accent1"/>
-          </a:effectRef>
-          <a:fontRef idx="minor">
-            <a:schemeClr val="tx1"/>
-          </a:fontRef>
-        </p:style>
       </p:cxnSp>
       <p:sp>
         <p:nvSpPr>
